--- a/docs/design-first-ai.pptx
+++ b/docs/design-first-ai.pptx
@@ -1990,7 +1990,7 @@
                   <a:srgbClr val="94A3B8"/>
                 </a:solidFill>
               </a:rPr>
-              <a:t>Based on Rahul Garg's Knowledge Priming and Design-First Collaboration patterns — martinfowler.com, 2026</a:t>
+              <a:t>Based on Rahul Garg’s Knowledge Priming, Design-First Collaboration, and Context Anchoring patterns — martinfowler.com, 2026</a:t>
             </a:r>
             <a:endParaRPr lang="en-US" sz="900" dirty="0"/>
           </a:p>
@@ -2767,7 +2767,6 @@
               </a:rPr>
               <a:t>3 / 9</a:t>
             </a:r>
-            <a:endParaRPr lang="en-US" sz="900" dirty="0"/>
           </a:p>
         </p:txBody>
       </p:sp>
@@ -2851,12 +2850,9 @@
                   <a:srgbClr val="FFFFFF"/>
                 </a:solidFill>
                 <a:latin typeface="Calibri" pitchFamily="34" charset="0"/>
-                <a:ea typeface="Calibri" pitchFamily="34" charset="-122"/>
-                <a:cs typeface="Calibri" pitchFamily="34" charset="-120"/>
-              </a:rPr>
-              <a:t>Two Complementary Models</a:t>
-            </a:r>
-            <a:endParaRPr lang="en-US" sz="2200" dirty="0"/>
+              </a:rPr>
+              <a:t>Three Complementary Patterns</a:t>
+            </a:r>
           </a:p>
         </p:txBody>
       </p:sp>
@@ -2868,8 +2864,8 @@
         </p:nvSpPr>
         <p:spPr>
           <a:xfrm>
-            <a:off x="320040" y="960120"/>
-            <a:ext cx="4023360" cy="3474720"/>
+            <a:off x="200000" y="960120"/>
+            <a:ext cx="2700000" cy="3474720"/>
           </a:xfrm>
           <a:prstGeom prst="rect">
             <a:avLst/>
@@ -2900,8 +2896,8 @@
         </p:nvSpPr>
         <p:spPr>
           <a:xfrm>
-            <a:off x="320040" y="960120"/>
-            <a:ext cx="4023360" cy="502920"/>
+            <a:off x="200000" y="960120"/>
+            <a:ext cx="2700000" cy="502920"/>
           </a:xfrm>
           <a:prstGeom prst="rect">
             <a:avLst/>
@@ -2925,8 +2921,8 @@
         </p:nvSpPr>
         <p:spPr>
           <a:xfrm>
-            <a:off x="411480" y="1005840"/>
-            <a:ext cx="3840480" cy="411480"/>
+            <a:off x="291440" y="1005840"/>
+            <a:ext cx="2517120" cy="411480"/>
           </a:xfrm>
           <a:prstGeom prst="rect">
             <a:avLst/>
@@ -2947,12 +2943,9 @@
                   <a:srgbClr val="FFFFFF"/>
                 </a:solidFill>
                 <a:latin typeface="Calibri" pitchFamily="34" charset="0"/>
-                <a:ea typeface="Calibri" pitchFamily="34" charset="-122"/>
-                <a:cs typeface="Calibri" pitchFamily="34" charset="-120"/>
               </a:rPr>
               <a:t>Knowledge Priming</a:t>
             </a:r>
-            <a:endParaRPr lang="en-US" sz="1400" dirty="0"/>
           </a:p>
         </p:txBody>
       </p:sp>
@@ -2964,8 +2957,8 @@
         </p:nvSpPr>
         <p:spPr>
           <a:xfrm>
-            <a:off x="411480" y="1508760"/>
-            <a:ext cx="3749040" cy="320040"/>
+            <a:off x="291440" y="1508760"/>
+            <a:ext cx="2517120" cy="320040"/>
           </a:xfrm>
           <a:prstGeom prst="rect">
             <a:avLst/>
@@ -2986,12 +2979,9 @@
                   <a:srgbClr val="1E293B"/>
                 </a:solidFill>
                 <a:latin typeface="Calibri" pitchFamily="34" charset="0"/>
-                <a:ea typeface="Calibri" pitchFamily="34" charset="-122"/>
-                <a:cs typeface="Calibri" pitchFamily="34" charset="-120"/>
               </a:rPr>
               <a:t>Load context before every session</a:t>
             </a:r>
-            <a:endParaRPr lang="en-US" sz="1100" dirty="0"/>
           </a:p>
         </p:txBody>
       </p:sp>
@@ -3003,8 +2993,8 @@
         </p:nvSpPr>
         <p:spPr>
           <a:xfrm>
-            <a:off x="411480" y="1874520"/>
-            <a:ext cx="3794760" cy="2286000"/>
+            <a:off x="291440" y="1874520"/>
+            <a:ext cx="2517120" cy="2286000"/>
           </a:xfrm>
           <a:prstGeom prst="rect">
             <a:avLst/>
@@ -3025,12 +3015,9 @@
                   <a:srgbClr val="64748B"/>
                 </a:solidFill>
                 <a:latin typeface="Calibri" pitchFamily="34" charset="0"/>
-                <a:ea typeface="Calibri" pitchFamily="34" charset="-122"/>
-                <a:cs typeface="Calibri" pitchFamily="34" charset="-120"/>
               </a:rPr>
               <a:t>Without context, AI defaults to the average of the internet — not your codebase.</a:t>
             </a:r>
-            <a:endParaRPr lang="en-US" sz="1100" dirty="0"/>
           </a:p>
           <a:p>
             <a:pPr algn="l" indent="0" marL="0">
@@ -3041,13 +3028,9 @@
                 <a:solidFill>
                   <a:srgbClr val="64748B"/>
                 </a:solidFill>
-                <a:latin typeface="Calibri" pitchFamily="34" charset="0"/>
-                <a:ea typeface="Calibri" pitchFamily="34" charset="-122"/>
-                <a:cs typeface="Calibri" pitchFamily="34" charset="-120"/>
-              </a:rPr>
-              <a:t> </a:t>
-            </a:r>
-            <a:endParaRPr lang="en-US" sz="1100" dirty="0"/>
+              </a:rPr>
+              <a:t xml:space="preserve"> </a:t>
+            </a:r>
           </a:p>
           <a:p>
             <a:pPr algn="l" indent="0" marL="0">
@@ -3059,12 +3042,9 @@
                   <a:srgbClr val="64748B"/>
                 </a:solidFill>
                 <a:latin typeface="Calibri" pitchFamily="34" charset="0"/>
-                <a:ea typeface="Calibri" pitchFamily="34" charset="-122"/>
-                <a:cs typeface="Calibri" pitchFamily="34" charset="-120"/>
               </a:rPr>
               <a:t>Six layers of structured context files prime the AI before design or implementation begins.</a:t>
             </a:r>
-            <a:endParaRPr lang="en-US" sz="1100" dirty="0"/>
           </a:p>
           <a:p>
             <a:pPr algn="l" indent="0" marL="0">
@@ -3075,13 +3055,9 @@
                 <a:solidFill>
                   <a:srgbClr val="64748B"/>
                 </a:solidFill>
-                <a:latin typeface="Calibri" pitchFamily="34" charset="0"/>
-                <a:ea typeface="Calibri" pitchFamily="34" charset="-122"/>
-                <a:cs typeface="Calibri" pitchFamily="34" charset="-120"/>
-              </a:rPr>
-              <a:t> </a:t>
-            </a:r>
-            <a:endParaRPr lang="en-US" sz="1100" dirty="0"/>
+              </a:rPr>
+              <a:t xml:space="preserve"> </a:t>
+            </a:r>
           </a:p>
           <a:p>
             <a:pPr algn="l" indent="0" marL="0">
@@ -3093,25 +3069,58 @@
                   <a:srgbClr val="64748B"/>
                 </a:solidFill>
                 <a:latin typeface="Calibri" pitchFamily="34" charset="0"/>
-                <a:ea typeface="Calibri" pitchFamily="34" charset="-122"/>
-                <a:cs typeface="Calibri" pitchFamily="34" charset="-120"/>
-              </a:rPr>
-              <a:t>Layers 1–2 load automatically. Layers 3–5 are loaded per task.</a:t>
-            </a:r>
-            <a:endParaRPr lang="en-US" sz="1100" dirty="0"/>
-          </a:p>
-        </p:txBody>
-      </p:sp>
-      <p:sp>
-        <p:nvSpPr>
-          <p:cNvPr id="11" name="Shape 9"/>
-          <p:cNvSpPr/>
-          <p:nvPr/>
-        </p:nvSpPr>
-        <p:spPr>
-          <a:xfrm>
-            <a:off x="4800600" y="960120"/>
-            <a:ext cx="4023360" cy="3474720"/>
+              </a:rPr>
+              <a:t>Layers 1–2 load automatically. Layer 3 skills and story context load per task.</a:t>
+            </a:r>
+          </a:p>
+        </p:txBody>
+      </p:sp>
+      <p:sp>
+        <p:nvSpPr>
+          <p:cNvPr id="11" name="Text plus1"/>
+          <p:cNvSpPr/>
+          <p:nvPr/>
+        </p:nvSpPr>
+        <p:spPr>
+          <a:xfrm>
+            <a:off x="2786680" y="2194560"/>
+            <a:ext cx="548640" cy="548640"/>
+          </a:xfrm>
+          <a:prstGeom prst="rect">
+            <a:avLst/>
+          </a:prstGeom>
+          <a:noFill/>
+          <a:ln/>
+        </p:spPr>
+        <p:txBody>
+          <a:bodyPr wrap="square" lIns="0" tIns="0" rIns="0" bIns="0" rtlCol="0" anchor="ctr"/>
+          <a:lstStyle/>
+          <a:p>
+            <a:pPr algn="ctr" indent="0" marL="0">
+              <a:buNone/>
+            </a:pPr>
+            <a:r>
+              <a:rPr lang="en-US" sz="2800" b="1" dirty="0">
+                <a:solidFill>
+                  <a:srgbClr val="0D9488"/>
+                </a:solidFill>
+                <a:latin typeface="Calibri" pitchFamily="34" charset="0"/>
+              </a:rPr>
+              <a:t>+</a:t>
+            </a:r>
+          </a:p>
+        </p:txBody>
+      </p:sp>
+      <p:sp>
+        <p:nvSpPr>
+          <p:cNvPr id="12" name="Shape 9"/>
+          <p:cNvSpPr/>
+          <p:nvPr/>
+        </p:nvSpPr>
+        <p:spPr>
+          <a:xfrm>
+            <a:off x="3222000" y="960120"/>
+            <a:ext cx="2700000" cy="3474720"/>
           </a:xfrm>
           <a:prstGeom prst="rect">
             <a:avLst/>
@@ -3136,14 +3145,14 @@
       </p:sp>
       <p:sp>
         <p:nvSpPr>
-          <p:cNvPr id="12" name="Shape 10"/>
-          <p:cNvSpPr/>
-          <p:nvPr/>
-        </p:nvSpPr>
-        <p:spPr>
-          <a:xfrm>
-            <a:off x="4800600" y="960120"/>
-            <a:ext cx="4023360" cy="502920"/>
+          <p:cNvPr id="13" name="Shape 10"/>
+          <p:cNvSpPr/>
+          <p:nvPr/>
+        </p:nvSpPr>
+        <p:spPr>
+          <a:xfrm>
+            <a:off x="3222000" y="960120"/>
+            <a:ext cx="2700000" cy="502920"/>
           </a:xfrm>
           <a:prstGeom prst="rect">
             <a:avLst/>
@@ -3161,14 +3170,14 @@
       </p:sp>
       <p:sp>
         <p:nvSpPr>
-          <p:cNvPr id="13" name="Text 11"/>
-          <p:cNvSpPr/>
-          <p:nvPr/>
-        </p:nvSpPr>
-        <p:spPr>
-          <a:xfrm>
-            <a:off x="4892040" y="1005840"/>
-            <a:ext cx="3840480" cy="411480"/>
+          <p:cNvPr id="14" name="Text 11"/>
+          <p:cNvSpPr/>
+          <p:nvPr/>
+        </p:nvSpPr>
+        <p:spPr>
+          <a:xfrm>
+            <a:off x="3313440" y="1005840"/>
+            <a:ext cx="2517120" cy="411480"/>
           </a:xfrm>
           <a:prstGeom prst="rect">
             <a:avLst/>
@@ -3189,25 +3198,22 @@
                   <a:srgbClr val="FFFFFF"/>
                 </a:solidFill>
                 <a:latin typeface="Calibri" pitchFamily="34" charset="0"/>
-                <a:ea typeface="Calibri" pitchFamily="34" charset="-122"/>
-                <a:cs typeface="Calibri" pitchFamily="34" charset="-120"/>
               </a:rPr>
               <a:t>Design-First Collaboration</a:t>
             </a:r>
-            <a:endParaRPr lang="en-US" sz="1400" dirty="0"/>
-          </a:p>
-        </p:txBody>
-      </p:sp>
-      <p:sp>
-        <p:nvSpPr>
-          <p:cNvPr id="14" name="Text 12"/>
-          <p:cNvSpPr/>
-          <p:nvPr/>
-        </p:nvSpPr>
-        <p:spPr>
-          <a:xfrm>
-            <a:off x="4892040" y="1508760"/>
-            <a:ext cx="3749040" cy="320040"/>
+          </a:p>
+        </p:txBody>
+      </p:sp>
+      <p:sp>
+        <p:nvSpPr>
+          <p:cNvPr id="15" name="Text 12"/>
+          <p:cNvSpPr/>
+          <p:nvPr/>
+        </p:nvSpPr>
+        <p:spPr>
+          <a:xfrm>
+            <a:off x="3313440" y="1508760"/>
+            <a:ext cx="2517120" cy="320040"/>
           </a:xfrm>
           <a:prstGeom prst="rect">
             <a:avLst/>
@@ -3228,25 +3234,22 @@
                   <a:srgbClr val="1E293B"/>
                 </a:solidFill>
                 <a:latin typeface="Calibri" pitchFamily="34" charset="0"/>
-                <a:ea typeface="Calibri" pitchFamily="34" charset="-122"/>
-                <a:cs typeface="Calibri" pitchFamily="34" charset="-120"/>
               </a:rPr>
               <a:t>Separate design from implementation</a:t>
             </a:r>
-            <a:endParaRPr lang="en-US" sz="1100" dirty="0"/>
-          </a:p>
-        </p:txBody>
-      </p:sp>
-      <p:sp>
-        <p:nvSpPr>
-          <p:cNvPr id="15" name="Text 13"/>
-          <p:cNvSpPr/>
-          <p:nvPr/>
-        </p:nvSpPr>
-        <p:spPr>
-          <a:xfrm>
-            <a:off x="4892040" y="1874520"/>
-            <a:ext cx="3794760" cy="2286000"/>
+          </a:p>
+        </p:txBody>
+      </p:sp>
+      <p:sp>
+        <p:nvSpPr>
+          <p:cNvPr id="16" name="Text 13"/>
+          <p:cNvSpPr/>
+          <p:nvPr/>
+        </p:nvSpPr>
+        <p:spPr>
+          <a:xfrm>
+            <a:off x="3313440" y="1874520"/>
+            <a:ext cx="2517120" cy="2286000"/>
           </a:xfrm>
           <a:prstGeom prst="rect">
             <a:avLst/>
@@ -3267,12 +3270,9 @@
                   <a:srgbClr val="64748B"/>
                 </a:solidFill>
                 <a:latin typeface="Calibri" pitchFamily="34" charset="0"/>
-                <a:ea typeface="Calibri" pitchFamily="34" charset="-122"/>
-                <a:cs typeface="Calibri" pitchFamily="34" charset="-120"/>
-              </a:rPr>
-              <a:t>Five progressive conversation levels. No code until Level 5 is approved.</a:t>
-            </a:r>
-            <a:endParaRPr lang="en-US" sz="1100" dirty="0"/>
+              </a:rPr>
+              <a:t>Five design dimensions serve as the quality bar for the implementation guide.</a:t>
+            </a:r>
           </a:p>
           <a:p>
             <a:pPr algn="l" indent="0" marL="0">
@@ -3283,13 +3283,9 @@
                 <a:solidFill>
                   <a:srgbClr val="64748B"/>
                 </a:solidFill>
-                <a:latin typeface="Calibri" pitchFamily="34" charset="0"/>
-                <a:ea typeface="Calibri" pitchFamily="34" charset="-122"/>
-                <a:cs typeface="Calibri" pitchFamily="34" charset="-120"/>
-              </a:rPr>
-              <a:t> </a:t>
-            </a:r>
-            <a:endParaRPr lang="en-US" sz="1100" dirty="0"/>
+              </a:rPr>
+              <a:t xml:space="preserve"> </a:t>
+            </a:r>
           </a:p>
           <a:p>
             <a:pPr algn="l" indent="0" marL="0">
@@ -3301,12 +3297,9 @@
                   <a:srgbClr val="64748B"/>
                 </a:solidFill>
                 <a:latin typeface="Calibri" pitchFamily="34" charset="0"/>
-                <a:ea typeface="Calibri" pitchFamily="34" charset="-122"/>
-                <a:cs typeface="Calibri" pitchFamily="34" charset="-120"/>
-              </a:rPr>
-              <a:t>Each level gets explicit sign-off before advancing. Design decisions stay visible.</a:t>
-            </a:r>
-            <a:endParaRPr lang="en-US" sz="1100" dirty="0"/>
+              </a:rPr>
+              <a:t>Build docs/impl-guide.md through 2–3 iterations, reviewing each dimension. Agent executes when the guide is correct.</a:t>
+            </a:r>
           </a:p>
           <a:p>
             <a:pPr algn="l" indent="0" marL="0">
@@ -3317,13 +3310,9 @@
                 <a:solidFill>
                   <a:srgbClr val="64748B"/>
                 </a:solidFill>
-                <a:latin typeface="Calibri" pitchFamily="34" charset="0"/>
-                <a:ea typeface="Calibri" pitchFamily="34" charset="-122"/>
-                <a:cs typeface="Calibri" pitchFamily="34" charset="-120"/>
-              </a:rPr>
-              <a:t> </a:t>
-            </a:r>
-            <a:endParaRPr lang="en-US" sz="1100" dirty="0"/>
+              </a:rPr>
+              <a:t xml:space="preserve"> </a:t>
+            </a:r>
           </a:p>
           <a:p>
             <a:pPr algn="l" indent="0" marL="0">
@@ -3335,24 +3324,21 @@
                   <a:srgbClr val="64748B"/>
                 </a:solidFill>
                 <a:latin typeface="Calibri" pitchFamily="34" charset="0"/>
-                <a:ea typeface="Calibri" pitchFamily="34" charset="-122"/>
-                <a:cs typeface="Calibri" pitchFamily="34" charset="-120"/>
               </a:rPr>
               <a:t>Scope, components, interactions, contracts — all agreed before the first line of code.</a:t>
             </a:r>
-            <a:endParaRPr lang="en-US" sz="1100" dirty="0"/>
-          </a:p>
-        </p:txBody>
-      </p:sp>
-      <p:sp>
-        <p:nvSpPr>
-          <p:cNvPr id="16" name="Text 14"/>
-          <p:cNvSpPr/>
-          <p:nvPr/>
-        </p:nvSpPr>
-        <p:spPr>
-          <a:xfrm>
-            <a:off x="4297680" y="2194560"/>
+          </a:p>
+        </p:txBody>
+      </p:sp>
+      <p:sp>
+        <p:nvSpPr>
+          <p:cNvPr id="17" name="Text plus2"/>
+          <p:cNvSpPr/>
+          <p:nvPr/>
+        </p:nvSpPr>
+        <p:spPr>
+          <a:xfrm>
+            <a:off x="5808680" y="2194560"/>
             <a:ext cx="548640" cy="548640"/>
           </a:xfrm>
           <a:prstGeom prst="rect">
@@ -3374,12 +3360,228 @@
                   <a:srgbClr val="0D9488"/>
                 </a:solidFill>
                 <a:latin typeface="Calibri" pitchFamily="34" charset="0"/>
-                <a:ea typeface="Calibri" pitchFamily="34" charset="-122"/>
-                <a:cs typeface="Calibri" pitchFamily="34" charset="-120"/>
               </a:rPr>
               <a:t>+</a:t>
             </a:r>
-            <a:endParaRPr lang="en-US" sz="2800" dirty="0"/>
+          </a:p>
+        </p:txBody>
+      </p:sp>
+      <p:sp>
+        <p:nvSpPr>
+          <p:cNvPr id="18" name="Shape CA"/>
+          <p:cNvSpPr/>
+          <p:nvPr/>
+        </p:nvSpPr>
+        <p:spPr>
+          <a:xfrm>
+            <a:off x="6244000" y="960120"/>
+            <a:ext cx="2700000" cy="3474720"/>
+          </a:xfrm>
+          <a:prstGeom prst="rect">
+            <a:avLst/>
+          </a:prstGeom>
+          <a:solidFill>
+            <a:srgbClr val="FFFFFF"/>
+          </a:solidFill>
+          <a:ln w="6350">
+            <a:solidFill>
+              <a:srgbClr val="CBD5E1"/>
+            </a:solidFill>
+            <a:prstDash val="solid"/>
+          </a:ln>
+          <a:effectLst>
+            <a:outerShdw sx="100000" sy="100000" kx="0" ky="0" algn="bl" rotWithShape="0" blurRad="101600" dist="38100" dir="8100000">
+              <a:srgbClr val="000000">
+                <a:alpha val="10000"/>
+              </a:srgbClr>
+            </a:outerShdw>
+          </a:effectLst>
+        </p:spPr>
+      </p:sp>
+      <p:sp>
+        <p:nvSpPr>
+          <p:cNvPr id="19" name="Shape CA_hdr"/>
+          <p:cNvSpPr/>
+          <p:nvPr/>
+        </p:nvSpPr>
+        <p:spPr>
+          <a:xfrm>
+            <a:off x="6244000" y="960120"/>
+            <a:ext cx="2700000" cy="502920"/>
+          </a:xfrm>
+          <a:prstGeom prst="rect">
+            <a:avLst/>
+          </a:prstGeom>
+          <a:solidFill>
+            <a:srgbClr val="8B5CF6"/>
+          </a:solidFill>
+          <a:ln w="12700">
+            <a:solidFill>
+              <a:srgbClr val="333333"/>
+            </a:solidFill>
+            <a:prstDash val="solid"/>
+          </a:ln>
+        </p:spPr>
+      </p:sp>
+      <p:sp>
+        <p:nvSpPr>
+          <p:cNvPr id="20" name="Text CA_title"/>
+          <p:cNvSpPr/>
+          <p:nvPr/>
+        </p:nvSpPr>
+        <p:spPr>
+          <a:xfrm>
+            <a:off x="6335440" y="1005840"/>
+            <a:ext cx="2517120" cy="411480"/>
+          </a:xfrm>
+          <a:prstGeom prst="rect">
+            <a:avLst/>
+          </a:prstGeom>
+          <a:noFill/>
+          <a:ln/>
+        </p:spPr>
+        <p:txBody>
+          <a:bodyPr wrap="square" lIns="0" tIns="0" rIns="0" bIns="0" rtlCol="0" anchor="ctr"/>
+          <a:lstStyle/>
+          <a:p>
+            <a:pPr algn="l" indent="0" marL="0">
+              <a:buNone/>
+            </a:pPr>
+            <a:r>
+              <a:rPr lang="en-US" sz="1400" b="1" dirty="0">
+                <a:solidFill>
+                  <a:srgbClr val="FFFFFF"/>
+                </a:solidFill>
+                <a:latin typeface="Calibri" pitchFamily="34" charset="0"/>
+              </a:rPr>
+              <a:t>Context Anchoring</a:t>
+            </a:r>
+          </a:p>
+        </p:txBody>
+      </p:sp>
+      <p:sp>
+        <p:nvSpPr>
+          <p:cNvPr id="21" name="Text CA_sub"/>
+          <p:cNvSpPr/>
+          <p:nvPr/>
+        </p:nvSpPr>
+        <p:spPr>
+          <a:xfrm>
+            <a:off x="6335440" y="1508760"/>
+            <a:ext cx="2517120" cy="320040"/>
+          </a:xfrm>
+          <a:prstGeom prst="rect">
+            <a:avLst/>
+          </a:prstGeom>
+          <a:noFill/>
+          <a:ln/>
+        </p:spPr>
+        <p:txBody>
+          <a:bodyPr wrap="square" lIns="0" tIns="0" rIns="0" bIns="0" rtlCol="0" anchor="ctr"/>
+          <a:lstStyle/>
+          <a:p>
+            <a:pPr algn="l" indent="0" marL="0">
+              <a:buNone/>
+            </a:pPr>
+            <a:r>
+              <a:rPr lang="en-US" sz="1100" b="1" dirty="0">
+                <a:solidFill>
+                  <a:srgbClr val="1E293B"/>
+                </a:solidFill>
+                <a:latin typeface="Calibri" pitchFamily="34" charset="0"/>
+              </a:rPr>
+              <a:t>Make design durable across sessions</a:t>
+            </a:r>
+          </a:p>
+        </p:txBody>
+      </p:sp>
+      <p:sp>
+        <p:nvSpPr>
+          <p:cNvPr id="22" name="Text CA_body"/>
+          <p:cNvSpPr/>
+          <p:nvPr/>
+        </p:nvSpPr>
+        <p:spPr>
+          <a:xfrm>
+            <a:off x="6335440" y="1874520"/>
+            <a:ext cx="2517120" cy="2286000"/>
+          </a:xfrm>
+          <a:prstGeom prst="rect">
+            <a:avLst/>
+          </a:prstGeom>
+          <a:noFill/>
+          <a:ln/>
+        </p:spPr>
+        <p:txBody>
+          <a:bodyPr wrap="square" lIns="0" tIns="0" rIns="0" bIns="0" rtlCol="0" anchor="ctr"/>
+          <a:lstStyle/>
+          <a:p>
+            <a:pPr algn="l" indent="0" marL="0">
+              <a:buNone/>
+            </a:pPr>
+            <a:r>
+              <a:rPr lang="en-US" sz="1100" dirty="0">
+                <a:solidFill>
+                  <a:srgbClr val="64748B"/>
+                </a:solidFill>
+                <a:latin typeface="Calibri" pitchFamily="34" charset="0"/>
+              </a:rPr>
+              <a:t>AI sessions are ephemeral. Decisions vanish when the session ends.</a:t>
+            </a:r>
+          </a:p>
+          <a:p>
+            <a:pPr algn="l" indent="0" marL="0">
+              <a:buNone/>
+            </a:pPr>
+            <a:r>
+              <a:rPr lang="en-US" sz="1100" dirty="0">
+                <a:solidFill>
+                  <a:srgbClr val="64748B"/>
+                </a:solidFill>
+              </a:rPr>
+              <a:t xml:space="preserve"> </a:t>
+            </a:r>
+          </a:p>
+          <a:p>
+            <a:pPr algn="l" indent="0" marL="0">
+              <a:buNone/>
+            </a:pPr>
+            <a:r>
+              <a:rPr lang="en-US" sz="1100" dirty="0">
+                <a:solidFill>
+                  <a:srgbClr val="64748B"/>
+                </a:solidFill>
+                <a:latin typeface="Calibri" pitchFamily="34" charset="0"/>
+              </a:rPr>
+              <a:t>The implementation guide and execution report persist across sessions, IDE restarts, and engineer changes.</a:t>
+            </a:r>
+          </a:p>
+          <a:p>
+            <a:pPr algn="l" indent="0" marL="0">
+              <a:buNone/>
+            </a:pPr>
+            <a:r>
+              <a:rPr lang="en-US" sz="1100" dirty="0">
+                <a:solidFill>
+                  <a:srgbClr val="64748B"/>
+                </a:solidFill>
+              </a:rPr>
+              <a:t xml:space="preserve"> </a:t>
+            </a:r>
+          </a:p>
+          <a:p>
+            <a:pPr algn="l" indent="0" marL="0">
+              <a:buNone/>
+            </a:pPr>
+            <a:r>
+              <a:rPr lang="en-US" sz="1100" dirty="0">
+                <a:solidFill>
+                  <a:srgbClr val="64748B"/>
+                </a:solidFill>
+                <a:latin typeface="Calibri" pitchFamily="34" charset="0"/>
+              </a:rPr>
+              <a:t>docs/impl-guide.md is the design record. docs/execution-report.md is the permanent record of what was built.</a:t>
+            </a:r>
           </a:p>
         </p:txBody>
       </p:sp>
@@ -6615,7 +6817,7 @@
                 <a:ea typeface="Calibri" pitchFamily="34" charset="-122"/>
                 <a:cs typeface="Calibri" pitchFamily="34" charset="-120"/>
               </a:rPr>
-              <a:t>One rule: no code until Level 5 is approved</a:t>
+              <a:t>One rule: design before code</a:t>
             </a:r>
             <a:endParaRPr lang="en-US" sz="900" dirty="0"/>
           </a:p>
@@ -7127,7 +7329,7 @@
                 <a:ea typeface="Calibri" pitchFamily="34" charset="-122"/>
                 <a:cs typeface="Calibri" pitchFamily="34" charset="-120"/>
               </a:rPr>
-              <a:t>BEFORE EACH SESSION</a:t>
+              <a:t>FOR EACH FEATURE</a:t>
             </a:r>
             <a:endParaRPr lang="en-US" sz="900" dirty="0"/>
           </a:p>
@@ -7290,7 +7492,7 @@
                 <a:ea typeface="Calibri" pitchFamily="34" charset="-122"/>
                 <a:cs typeface="Calibri" pitchFamily="34" charset="-120"/>
               </a:rPr>
-              <a:t>Layer 3–4 if relevant to task</a:t>
+              <a:t>context/skills/ loaded per task</a:t>
             </a:r>
             <a:endParaRPr lang="en-US" sz="900" dirty="0"/>
           </a:p>
@@ -7352,7 +7554,7 @@
                 <a:ea typeface="Calibri" pitchFamily="34" charset="-122"/>
                 <a:cs typeface="Calibri" pitchFamily="34" charset="-120"/>
               </a:rPr>
-              <a:t>Layer 5 story context → seeds Level 1</a:t>
+              <a:t>story context loaded per task</a:t>
             </a:r>
             <a:endParaRPr lang="en-US" sz="900" dirty="0"/>
           </a:p>
@@ -7480,7 +7682,7 @@
                 <a:ea typeface="Calibri" pitchFamily="34" charset="-122"/>
                 <a:cs typeface="Calibri" pitchFamily="34" charset="-120"/>
               </a:rPr>
-              <a:t>DESIGN CONVERSATION</a:t>
+              <a:t>DESIGN + EXECUTION</a:t>
             </a:r>
             <a:endParaRPr lang="en-US" sz="900" dirty="0"/>
           </a:p>
@@ -7519,7 +7721,7 @@
                 <a:ea typeface="Calibri" pitchFamily="34" charset="-122"/>
                 <a:cs typeface="Calibri" pitchFamily="34" charset="-120"/>
               </a:rPr>
-              <a:t>Level 1: Capabilities</a:t>
+              <a:t>docs/app-description.md + story</a:t>
             </a:r>
             <a:endParaRPr lang="en-US" sz="900" dirty="0"/>
           </a:p>
@@ -7581,7 +7783,7 @@
                 <a:ea typeface="Calibri" pitchFamily="34" charset="-122"/>
                 <a:cs typeface="Calibri" pitchFamily="34" charset="-120"/>
               </a:rPr>
-              <a:t>Level 2: Components</a:t>
+              <a:t>docs/impl-guide.md (draft)</a:t>
             </a:r>
             <a:endParaRPr lang="en-US" sz="900" dirty="0"/>
           </a:p>
@@ -7643,7 +7845,7 @@
                 <a:ea typeface="Calibri" pitchFamily="34" charset="-122"/>
                 <a:cs typeface="Calibri" pitchFamily="34" charset="-120"/>
               </a:rPr>
-              <a:t>Level 3: Interactions</a:t>
+              <a:t>iterate: review each dimension</a:t>
             </a:r>
             <a:endParaRPr lang="en-US" sz="900" dirty="0"/>
           </a:p>
@@ -7705,7 +7907,7 @@
                 <a:ea typeface="Calibri" pitchFamily="34" charset="-122"/>
                 <a:cs typeface="Calibri" pitchFamily="34" charset="-120"/>
               </a:rPr>
-              <a:t>Level 4: Contracts</a:t>
+              <a:t>approve impl-guide</a:t>
             </a:r>
             <a:endParaRPr lang="en-US" sz="900" dirty="0"/>
           </a:p>
@@ -7767,7 +7969,7 @@
                 <a:ea typeface="Calibri" pitchFamily="34" charset="-122"/>
                 <a:cs typeface="Calibri" pitchFamily="34" charset="-120"/>
               </a:rPr>
-              <a:t>Level 5: Implementation ← code here</a:t>
+              <a:t>agent executes ← code + tests</a:t>
             </a:r>
             <a:endParaRPr lang="en-US" sz="900" dirty="0"/>
           </a:p>
@@ -8931,7 +9133,7 @@
                 <a:ea typeface="Calibri" pitchFamily="34" charset="-122"/>
                 <a:cs typeface="Calibri" pitchFamily="34" charset="-120"/>
               </a:rPr>
-              <a:t> </a:t>
+              <a:t xml:space="preserve"> </a:t>
             </a:r>
             <a:endParaRPr lang="en-US" sz="1000" dirty="0"/>
           </a:p>
@@ -8965,7 +9167,7 @@
                 <a:ea typeface="Calibri" pitchFamily="34" charset="-122"/>
                 <a:cs typeface="Calibri" pitchFamily="34" charset="-120"/>
               </a:rPr>
-              <a:t> </a:t>
+              <a:t xml:space="preserve"> </a:t>
             </a:r>
             <a:endParaRPr lang="en-US" sz="1000" dirty="0"/>
           </a:p>
@@ -9615,7 +9817,7 @@
                 <a:ea typeface="Calibri" pitchFamily="34" charset="-122"/>
                 <a:cs typeface="Calibri" pitchFamily="34" charset="-120"/>
               </a:rPr>
-              <a:t>Fill in the Layer 1 template manually. Add Layer 2 when conventions stabilise. See guides/adoption.md for the week-by-week path.</a:t>
+              <a:t>Fill in the Layer 1 template manually. Add Layer 2 when conventions stabilise. See context/README.md for adoption guidance.</a:t>
             </a:r>
             <a:endParaRPr lang="en-US" sz="900" dirty="0"/>
           </a:p>
@@ -9853,7 +10055,7 @@
                 <a:ea typeface="Calibri" pitchFamily="34" charset="-122"/>
                 <a:cs typeface="Calibri" pitchFamily="34" charset="-120"/>
               </a:rPr>
-              <a:t>Write a Layer 5 story context file. Load it in Copilot Chat. Paste levels/master-prompt.md as your opening message. Work through the levels.</a:t>
+              <a:t>Read docs/design-workflow.md. Build an app description, write an implementation guide, iterate until correct, then execute with the agent.</a:t>
             </a:r>
             <a:endParaRPr lang="en-US" sz="900" dirty="0"/>
           </a:p>
@@ -9892,7 +10094,7 @@
                 <a:ea typeface="Consolas" pitchFamily="34" charset="-122"/>
                 <a:cs typeface="Consolas" pitchFamily="34" charset="-120"/>
               </a:rPr>
-              <a:t>levels/master-prompt.md</a:t>
+              <a:t>docs/design-workflow.md</a:t>
             </a:r>
             <a:endParaRPr lang="en-US" sz="800" dirty="0"/>
           </a:p>
@@ -10130,7 +10332,7 @@
                 <a:ea typeface="Consolas" pitchFamily="34" charset="-122"/>
                 <a:cs typeface="Consolas" pitchFamily="34" charset="-120"/>
               </a:rPr>
-              <a:t>examples/01-rag-endpoint/conversation/</a:t>
+              <a:t>examples/01-spring-mvc/conversation/</a:t>
             </a:r>
             <a:endParaRPr lang="en-US" sz="800" dirty="0"/>
           </a:p>
@@ -11057,7 +11259,7 @@
                 <a:ea typeface="Calibri" pitchFamily="34" charset="-122"/>
                 <a:cs typeface="Calibri" pitchFamily="34" charset="-120"/>
               </a:rPr>
-              <a:t>Five conversation levels</a:t>
+              <a:t>Document-driven workflow</a:t>
             </a:r>
             <a:endParaRPr lang="en-US" sz="900" dirty="0"/>
           </a:p>
@@ -11238,7 +11440,7 @@
                 <a:ea typeface="Calibri" pitchFamily="34" charset="-122"/>
                 <a:cs typeface="Calibri" pitchFamily="34" charset="-120"/>
               </a:rPr>
-              <a:t>github.com/your-org/design-first-ai</a:t>
+              <a:t>github.com/andresdiegolanda/design-first-ai</a:t>
             </a:r>
             <a:endParaRPr lang="en-US" sz="900" dirty="0"/>
           </a:p>
